--- a/research/presentations/abstract-full-explainer-slides.pptx
+++ b/research/presentations/abstract-full-explainer-slides.pptx
@@ -6163,7 +6163,7 @@
                             <a:srgbClr val="14141E"/>
                           </a:solidFill>
                         </a:rPr>
-                        <a:t>JMMLU（日本史中心4科目）</a:t>
+                        <a:t>JMMLU（公民・地理・慣用句、歴史は除外）</a:t>
                       </a:r>
                     </a:p>
                   </a:txBody>
